--- a/ppt/IoTAI14-EMLearn.pptx
+++ b/ppt/IoTAI14-EMLearn.pptx
@@ -4505,6 +4505,12 @@
             </a:r>
             <a:endParaRPr lang="fr-FR" dirty="0"/>
           </a:p>
+          <a:p>
+            <a:r>
+              <a:rPr lang="fr-FR" dirty="0"/>
+              <a:t>RF RUL</a:t>
+            </a:r>
+          </a:p>
         </p:txBody>
       </p:sp>
     </p:spTree>
@@ -5155,8 +5161,48 @@
             </a:r>
             <a:r>
               <a:rPr lang="fr-FR" dirty="0"/>
-              <a:t>', format='csv')</a:t>
-            </a:r>
+              <a:t>', format='csv’)</a:t>
+            </a:r>
+          </a:p>
+          <a:p>
+            <a:pPr lvl="1"/>
+            <a:r>
+              <a:rPr lang="fr-FR" dirty="0" err="1"/>
+              <a:t>cmodel.save</a:t>
+            </a:r>
+            <a:r>
+              <a:rPr lang="fr-FR" dirty="0"/>
+              <a:t>(file="</a:t>
+            </a:r>
+            <a:r>
+              <a:rPr lang="fr-FR" dirty="0" err="1"/>
+              <a:t>path</a:t>
+            </a:r>
+            <a:r>
+              <a:rPr lang="fr-FR" dirty="0"/>
+              <a:t>", </a:t>
+            </a:r>
+            <a:r>
+              <a:rPr lang="fr-FR" dirty="0" err="1"/>
+              <a:t>name</a:t>
+            </a:r>
+            <a:r>
+              <a:rPr lang="fr-FR" dirty="0"/>
+              <a:t>='</a:t>
+            </a:r>
+            <a:r>
+              <a:rPr lang="fr-FR" dirty="0" err="1"/>
+              <a:t>rf</a:t>
+            </a:r>
+            <a:r>
+              <a:rPr lang="fr-FR"/>
+              <a:t>')</a:t>
+            </a:r>
+            <a:endParaRPr lang="fr-FR" dirty="0"/>
+          </a:p>
+          <a:p>
+            <a:pPr lvl="1"/>
+            <a:endParaRPr lang="fr-FR" dirty="0"/>
           </a:p>
           <a:p>
             <a:endParaRPr lang="fr-FR" dirty="0"/>
@@ -5710,6 +5756,20 @@
             <a:r>
               <a:rPr lang="fr-FR" dirty="0"/>
               <a:t> Cancer sur Arduino</a:t>
+            </a:r>
+          </a:p>
+          <a:p>
+            <a:r>
+              <a:rPr lang="fr-FR" dirty="0"/>
+              <a:t>RF </a:t>
+            </a:r>
+            <a:r>
+              <a:rPr lang="fr-FR" dirty="0" err="1"/>
+              <a:t>Regression</a:t>
+            </a:r>
+            <a:r>
+              <a:rPr lang="fr-FR" dirty="0"/>
+              <a:t> RUL</a:t>
             </a:r>
           </a:p>
           <a:p>

--- a/ppt/IoTAI14-EMLearn.pptx
+++ b/ppt/IoTAI14-EMLearn.pptx
@@ -4343,13 +4343,8 @@
           <a:p>
             <a:r>
               <a:rPr lang="fr-FR" dirty="0"/>
-              <a:t>Les </a:t>
-            </a:r>
-            <a:r>
-              <a:rPr lang="fr-FR" dirty="0" err="1"/>
-              <a:t>concurents</a:t>
-            </a:r>
-            <a:endParaRPr lang="fr-FR" dirty="0"/>
+              <a:t>Les concurrents</a:t>
+            </a:r>
           </a:p>
         </p:txBody>
       </p:sp>
@@ -5163,42 +5158,6 @@
               <a:rPr lang="fr-FR" dirty="0"/>
               <a:t>', format='csv’)</a:t>
             </a:r>
-          </a:p>
-          <a:p>
-            <a:pPr lvl="1"/>
-            <a:r>
-              <a:rPr lang="fr-FR" dirty="0" err="1"/>
-              <a:t>cmodel.save</a:t>
-            </a:r>
-            <a:r>
-              <a:rPr lang="fr-FR" dirty="0"/>
-              <a:t>(file="</a:t>
-            </a:r>
-            <a:r>
-              <a:rPr lang="fr-FR" dirty="0" err="1"/>
-              <a:t>path</a:t>
-            </a:r>
-            <a:r>
-              <a:rPr lang="fr-FR" dirty="0"/>
-              <a:t>", </a:t>
-            </a:r>
-            <a:r>
-              <a:rPr lang="fr-FR" dirty="0" err="1"/>
-              <a:t>name</a:t>
-            </a:r>
-            <a:r>
-              <a:rPr lang="fr-FR" dirty="0"/>
-              <a:t>='</a:t>
-            </a:r>
-            <a:r>
-              <a:rPr lang="fr-FR" dirty="0" err="1"/>
-              <a:t>rf</a:t>
-            </a:r>
-            <a:r>
-              <a:rPr lang="fr-FR"/>
-              <a:t>')</a:t>
-            </a:r>
-            <a:endParaRPr lang="fr-FR" dirty="0"/>
           </a:p>
           <a:p>
             <a:pPr lvl="1"/>
